--- a/Slides/Semana 10/semana_10_slides.pptx
+++ b/Slides/Semana 10/semana_10_slides.pptx
@@ -1045,7 +1045,7 @@
           <a:p>
             <a:r>
               <a:rPr lang="en-US" dirty="0"/>
-              <a:t>Notas: Amarrar a mini aula antes da demonstração. Cada item retorna na demonstração ao vivo (carregar → posicionar → Color → Roughness → integrar → criar no Krita) e no estúdio (Asset 02 recebe o detalhe de stencil). Lembrar: semana de crítica 🔵 Informal — sem nota, mas o professor registra evidências de C5 e C2 para calibrar a CF4 (Semana 11). O Asset 02 precisa sair desta semana em estado de apresentação.</a:t>
+              <a:t>Notas: Amarrar a mini aula antes da demonstração. Cada item retorna na demonstração ao vivo (carregar → posicionar → Color → Roughness → integrar → criar no Krita) e no estúdio (Asset 02 recebe o detalhe de stencil). Lembrar: semana de crítica 🔵 Informal — sem nota, mas o professor registra evidências de C5 e C2 para calibrar a CF3 (Semana 11). O Asset 02 precisa sair desta semana em estado de apresentação.</a:t>
             </a:r>
             <a:endParaRPr lang="en-US" dirty="0"/>
           </a:p>

--- a/Slides/Semana 10/semana_10_slides.pptx
+++ b/Slides/Semana 10/semana_10_slides.pptx
@@ -605,7 +605,7 @@
           <a:p>
             <a:r>
               <a:rPr lang="en-US" dirty="0"/>
-              <a:t>Notas: Segundo erro-chave depois da integração: posicionamento aleatório. Rachaduras no meio de uma superfície plana sem fissuras ao redor denunciam falta de lógica narrativa. Demonstrar que o stencil permanece fixo enquanto se muda de face reforça a natureza de "gabarito no espaço" (não segue o brush). A incapacidade do estudante de justificar a posição é o sinal a caçar na circulação. Controles no 3D Coat: Drag move, Ctrl+Drag escala, Shift+Drag rotaciona; tecla S ativa/desativa.</a:t>
+              <a:t>Notas: Segundo erro-chave depois da integração: posicionamento aleatório. Rachaduras no meio de uma superfície plana sem fissuras ao redor denunciam falta de lógica narrativa. Demonstrar que o stencil permanece fixo enquanto se muda de face reforça a natureza de "gabarito no espaço" (não segue o brush). A incapacidade do estudante de justificar a posição é o sinal a caçar na circulação. Controles no 3DCoatTextura: Drag move, Ctrl+Drag escala, Shift+Drag rotaciona; tecla S ativa/desativa.</a:t>
             </a:r>
             <a:endParaRPr lang="en-US" dirty="0"/>
           </a:p>
@@ -1137,8 +1137,8 @@
 [!FIGURA]
 Objetivo didático: antecipar o resultado esperado da demonstração para que a turma reconheça o alvo visual antes de produzir no estúdio.
 Arquivo sugerido: assets/demo_stencil_rachadura.webp
-Descrição: captura do Render Room do 3D Coat mostrando o asset de pedra com uma rachadura aplicada por stencil, saindo de uma aresta em direção ao centro — interior mais claro no Color e superfície mais rugosa no Roughness, com micro-trincas irradiando. Painel de Stencils visível à lateral com o gabarito carregado e o painel de Layers com Stencil_Rachadura_Color e Stencil_Rachadura_Rough nomeadas.
-Como produzir: no 3D Coat, aplicar o stencil de rachadura no asset de demonstração seguindo o percurso da demonstração (Color + Roughness + integração de bordas); abrir o Render Room com iluminação HDR e capturar em ângulo que mostre a rachadura na aresta, com os painéis de Stencils e Layers abertos.</a:t>
+Descrição: captura do Render Room do 3DCoatTextura mostrando o asset de pedra com uma rachadura aplicada por stencil, saindo de uma aresta em direção ao centro — interior mais claro no Color e superfície mais rugosa no Roughness, com micro-trincas irradiando. Painel de Stencils visível à lateral com o gabarito carregado e o painel de Layers com Stencil_Rachadura_Color e Stencil_Rachadura_Rough nomeadas.
+Como produzir: no 3DCoatTextura, aplicar o stencil de rachadura no asset de demonstração seguindo o percurso da demonstração (Color + Roughness + integração de bordas); abrir o Render Room com iluminação HDR e capturar em ângulo que mostre a rachadura na aresta, com os painéis de Stencils e Layers abertos.</a:t>
             </a:r>
             <a:endParaRPr lang="en-US" dirty="0"/>
           </a:p>
@@ -1226,7 +1226,7 @@
           <a:p>
             <a:r>
               <a:rPr lang="en-US" dirty="0"/>
-              <a:t>Notas: Ler rápido. Não antecipar bake de Normal/AO/Curvature (Semana 11) nem trim sheets/atlas (Unidade IV). Hoje é detalhe estampado com intenção, usando o 3D Coat já conhecido da Semana 8 e a pintura livre da Semana 9. O objetivo 4 (decisão projetual) é o coração da aula — o stencil é ferramenta de precisão, não de conveniência. Reforçar que a técnica é simples; a decisão de onde e por que aplicar é o que importa.</a:t>
+              <a:t>Notas: Ler rápido. Não antecipar bake de Normal/AO/Curvature (Semana 11) nem trim sheets/atlas (Unidade IV). Hoje é detalhe estampado com intenção, usando o 3DCoatTextura já conhecido da Semana 8 e a pintura livre da Semana 9. O objetivo 4 (decisão projetual) é o coração da aula — o stencil é ferramenta de precisão, não de conveniência. Reforçar que a técnica é simples; a decisão de onde e por que aplicar é o que importa.</a:t>
             </a:r>
             <a:endParaRPr lang="en-US" dirty="0"/>
           </a:p>
@@ -1319,7 +1319,7 @@
 Objetivo didático: materializar a distinção central da aula — precisão controlada (stencil) versus irregularidade orgânica (pintura livre) — antes de qualquer explicação de menu.
 Arquivo sugerido: assets/rachadura_brush_vs_stencil.webp
 Descrição: comparação lado a lado da mesma superfície de pedra. À esquerda, rachadura pintada à mão livre com brush, com traços irregulares e bordas imprecisas. À direita, a mesma rachadura aplicada por stencil, com forma definida, ramificações nítidas e bordas limpas.
-Como produzir: no 3D Coat, no asset de pedra de demonstração, pintar uma rachadura à mão livre no canal Color e capturar o Render Room; em seguida, aplicar um stencil de rachadura e capturar no mesmo ângulo e iluminação. Compor as duas capturas lado a lado no Krita.</a:t>
+Como produzir: no 3DCoatTextura, no asset de pedra de demonstração, pintar uma rachadura à mão livre no canal Color e capturar o Render Room; em seguida, aplicar um stencil de rachadura e capturar no mesmo ângulo e iluminação. Compor as duas capturas lado a lado no Krita.</a:t>
             </a:r>
             <a:endParaRPr lang="en-US" dirty="0"/>
           </a:p>
@@ -1495,7 +1495,7 @@
           <a:p>
             <a:r>
               <a:rPr lang="en-US" dirty="0"/>
-              <a:t>Notas: A distinção mais importante da aula — e a fonte do erro mais comum de interface (usar o painel de Alphas em vez do de Stencils). O alpha se repete ao longo da pincelada; o stencil permanece fixo no espaço 3D independentemente de onde o brush passa. No 3D Coat, o stencil fica no painel Stencils (aba lateral) e é ativado/desativado com a tecla S. Com o stencil ativo, qualquer brush obedece ao gabarito. Deixar a metáfora carimbo/molde bem fixada — ela resolve a confusão no estúdio.</a:t>
+              <a:t>Notas: A distinção mais importante da aula — e a fonte do erro mais comum de interface (usar o painel de Alphas em vez do de Stencils). O alpha se repete ao longo da pincelada; o stencil permanece fixo no espaço 3D independentemente de onde o brush passa. No 3DCoatTextura, o stencil fica no painel Stencils (aba lateral) e é ativado/desativado com a tecla S. Com o stencil ativo, qualquer brush obedece ao gabarito. Deixar a metáfora carimbo/molde bem fixada — ela resolve a confusão no estúdio.</a:t>
             </a:r>
             <a:endParaRPr lang="en-US" dirty="0"/>
           </a:p>
@@ -1759,7 +1759,7 @@
           <a:p>
             <a:r>
               <a:rPr lang="en-US" dirty="0"/>
-              <a:t>Notas: Explicar o PORQUÊ de cada passo, não só o clique. O contraste alto separa o detalhe (rachadura) do fundo; a conversão para grayscale garante que o 3D Coat leia o gabarito como máscara; o PNG 1024 é resolução suficiente para a maioria dos detalhes. Na demonstração este bloco leva ~4 min mas tem alto valor pedagógico: mostra ao estudante que ele não está limitado à biblioteca pronta. Opcional: Filters → Edge Detection para extrair só as bordas.</a:t>
+              <a:t>Notas: Explicar o PORQUÊ de cada passo, não só o clique. O contraste alto separa o detalhe (rachadura) do fundo; a conversão para grayscale garante que o 3DCoatTextura leia o gabarito como máscara; o PNG 1024 é resolução suficiente para a maioria dos detalhes. Na demonstração este bloco leva ~4 min mas tem alto valor pedagógico: mostra ao estudante que ele não está limitado à biblioteca pronta. Opcional: Filters → Edge Detection para extrair só as bordas.</a:t>
             </a:r>
             <a:endParaRPr lang="en-US" dirty="0"/>
           </a:p>
